--- a/tugas1/hasil/Tugas1_DistribusiEffort_Phoenix_Slide.pptx
+++ b/tugas1/hasil/Tugas1_DistribusiEffort_Phoenix_Slide.pptx
@@ -4821,11 +4821,11 @@
             <a:r>
               <a:rPr sz="1300" b="0" i="0">
                 <a:solidFill>
-                  <a:srgbClr val="D03B3B"/>
-                </a:solidFill>
-                <a:latin typeface="Calibri"/>
-              </a:rPr>
-              <a:t>[isi nama]</a:t>
+                  <a:srgbClr val="1F1F1F"/>
+                </a:solidFill>
+                <a:latin typeface="Calibri"/>
+              </a:rPr>
+              <a:t>EKA PUTRA KURNIA</a:t>
             </a:r>
           </a:p>
           <a:p>
@@ -4846,11 +4846,11 @@
             <a:r>
               <a:rPr sz="1300" b="0" i="0">
                 <a:solidFill>
-                  <a:srgbClr val="D03B3B"/>
-                </a:solidFill>
-                <a:latin typeface="Calibri"/>
-              </a:rPr>
-              <a:t>[isi NIM]</a:t>
+                  <a:srgbClr val="1F1F1F"/>
+                </a:solidFill>
+                <a:latin typeface="Calibri"/>
+              </a:rPr>
+              <a:t>25.55.2927</a:t>
             </a:r>
           </a:p>
           <a:p>

--- a/tugas1/hasil/Tugas1_DistribusiEffort_Phoenix_Slide.pptx
+++ b/tugas1/hasil/Tugas1_DistribusiEffort_Phoenix_Slide.pptx
@@ -4882,7 +4882,7 @@
                 </a:solidFill>
                 <a:latin typeface="Calibri"/>
               </a:rPr>
-              <a:t>Dosen: Emha Taufiq Luthfi, Ph.D.</a:t>
+              <a:t>Dosen: Melwin Syafrizal, Ph.D.</a:t>
             </a:r>
           </a:p>
         </p:txBody>
